--- a/data/09_internal_training/training_5.pptx
+++ b/data/09_internal_training/training_5.pptx
@@ -3140,29 +3140,12 @@
           <a:p/>
           <a:p>
             <a:r>
-              <a:t>风险管理部认为，消费科技 行业仍然面临若干</a:t>
-            </a:r>
-          </a:p>
-          <a:p>
-            <a:r>
-              <a:t>不确定性因素，包括技术迭代风险、政策变化、</a:t>
-            </a:r>
-          </a:p>
-          <a:p>
-            <a:r>
-              <a:t>以及市场竞争加剧等问题。</a:t>
-            </a:r>
-          </a:p>
-          <a:p/>
-          <a:p/>
-          <a:p>
-            <a:r>
               <a:t>华辰资本旗下的 HC Energy Transition Fund 在最近的资产配置会议中</a:t>
             </a:r>
           </a:p>
           <a:p>
             <a:r>
-              <a:t>讨论了 消费科技 行业的投资机会，并对 银嘉信息有限公司</a:t>
+              <a:t>讨论了 人工智能 行业的投资机会，并对 华成育卓传媒有限公司</a:t>
             </a:r>
           </a:p>
           <a:p>
@@ -3174,22 +3157,34 @@
           <a:p/>
           <a:p>
             <a:r>
-              <a:t>九方网络有限公司 是中国 新能源 行业的重要企业之一。</a:t>
-            </a:r>
-          </a:p>
-          <a:p>
-            <a:r>
-              <a:t>根据华辰资本 风险管理部 的研究，该公司成立于 2009 年，</a:t>
-            </a:r>
-          </a:p>
-          <a:p>
-            <a:r>
-              <a:t>目前员工规模约 7967 人。公司近年来持续加大研发投入，</a:t>
-            </a:r>
-          </a:p>
-          <a:p>
-            <a:r>
-              <a:t>在核心技术方面形成了较强的竞争壁垒。</a:t>
+              <a:t>从产业链角度看，新能源 行业主要由上游设备厂商、</a:t>
+            </a:r>
+          </a:p>
+          <a:p>
+            <a:r>
+              <a:t>中游平台企业以及下游应用厂商组成。</a:t>
+            </a:r>
+          </a:p>
+          <a:p>
+            <a:r>
+              <a:t>戴硕电子网络有限公司 主要位于产业链的 下游 环节。</a:t>
+            </a:r>
+          </a:p>
+          <a:p/>
+          <a:p/>
+          <a:p>
+            <a:r>
+              <a:t>从产业链角度看，人工智能 行业主要由上游设备厂商、</a:t>
+            </a:r>
+          </a:p>
+          <a:p>
+            <a:r>
+              <a:t>中游平台企业以及下游应用厂商组成。</a:t>
+            </a:r>
+          </a:p>
+          <a:p>
+            <a:r>
+              <a:t>惠派国际公司科技有限公司 主要位于产业链的 下游 环节。</a:t>
             </a:r>
           </a:p>
           <a:p/>
@@ -3251,51 +3246,61 @@
           <a:p/>
           <a:p>
             <a:r>
-              <a:t>根据内部财务模型测算，南康网络有限公司 在未来三年</a:t>
-            </a:r>
-          </a:p>
-          <a:p>
-            <a:r>
-              <a:t>收入复合增长率预计可达到 34% 左右。</a:t>
-            </a:r>
-          </a:p>
-          <a:p>
-            <a:r>
-              <a:t>该预测基于行业需求增长以及公司产能扩张计划。</a:t>
-            </a:r>
-          </a:p>
-          <a:p/>
-          <a:p/>
-          <a:p>
-            <a:r>
-              <a:t>从产业链角度看，机器人 行业主要由上游设备厂商、</a:t>
-            </a:r>
-          </a:p>
-          <a:p>
-            <a:r>
-              <a:t>中游平台企业以及下游应用厂商组成。</a:t>
-            </a:r>
-          </a:p>
-          <a:p>
-            <a:r>
-              <a:t>东方峻景网络有限公司 主要位于产业链的 上游 环节。</a:t>
-            </a:r>
-          </a:p>
-          <a:p/>
-          <a:p/>
-          <a:p>
-            <a:r>
-              <a:t>根据内部财务模型测算，快讯网络有限公司 在未来三年</a:t>
-            </a:r>
-          </a:p>
-          <a:p>
-            <a:r>
-              <a:t>收入复合增长率预计可达到 32% 左右。</a:t>
-            </a:r>
-          </a:p>
-          <a:p>
-            <a:r>
-              <a:t>该预测基于行业需求增长以及公司产能扩张计划。</a:t>
+              <a:t>佳禾传媒有限公司 是中国 云计算 行业的重要企业之一。</a:t>
+            </a:r>
+          </a:p>
+          <a:p>
+            <a:r>
+              <a:t>根据华辰资本 风险管理部 的研究，该公司成立于 2016 年，</a:t>
+            </a:r>
+          </a:p>
+          <a:p>
+            <a:r>
+              <a:t>目前员工规模约 3802 人。公司近年来持续加大研发投入，</a:t>
+            </a:r>
+          </a:p>
+          <a:p>
+            <a:r>
+              <a:t>在核心技术方面形成了较强的竞争壁垒。</a:t>
+            </a:r>
+          </a:p>
+          <a:p/>
+          <a:p/>
+          <a:p>
+            <a:r>
+              <a:t>风险管理部认为，人工智能 行业仍然面临若干</a:t>
+            </a:r>
+          </a:p>
+          <a:p>
+            <a:r>
+              <a:t>不确定性因素，包括技术迭代风险、政策变化、</a:t>
+            </a:r>
+          </a:p>
+          <a:p>
+            <a:r>
+              <a:t>以及市场竞争加剧等问题。</a:t>
+            </a:r>
+          </a:p>
+          <a:p/>
+          <a:p/>
+          <a:p>
+            <a:r>
+              <a:t>飞利信科技有限公司 是中国 人工智能 行业的重要企业之一。</a:t>
+            </a:r>
+          </a:p>
+          <a:p>
+            <a:r>
+              <a:t>根据华辰资本 风险管理部 的研究，该公司成立于 2018 年，</a:t>
+            </a:r>
+          </a:p>
+          <a:p>
+            <a:r>
+              <a:t>目前员工规模约 1801 人。公司近年来持续加大研发投入，</a:t>
+            </a:r>
+          </a:p>
+          <a:p>
+            <a:r>
+              <a:t>在核心技术方面形成了较强的竞争壁垒。</a:t>
             </a:r>
           </a:p>
           <a:p/>
@@ -3357,29 +3362,12 @@
           <a:p/>
           <a:p>
             <a:r>
-              <a:t>风险管理部认为，云计算 行业仍然面临若干</a:t>
-            </a:r>
-          </a:p>
-          <a:p>
-            <a:r>
-              <a:t>不确定性因素，包括技术迭代风险、政策变化、</a:t>
-            </a:r>
-          </a:p>
-          <a:p>
-            <a:r>
-              <a:t>以及市场竞争加剧等问题。</a:t>
-            </a:r>
-          </a:p>
-          <a:p/>
-          <a:p/>
-          <a:p>
-            <a:r>
-              <a:t>华辰资本旗下的 HC Alpha Growth Fund 在最近的资产配置会议中</a:t>
-            </a:r>
-          </a:p>
-          <a:p>
-            <a:r>
-              <a:t>讨论了 半导体 行业的投资机会，并对 鸿睿思博信息有限公司</a:t>
+              <a:t>华辰资本旗下的 HC Energy Transition Fund 在最近的资产配置会议中</a:t>
+            </a:r>
+          </a:p>
+          <a:p>
+            <a:r>
+              <a:t>讨论了 人工智能 行业的投资机会，并对 巨奥传媒有限公司</a:t>
             </a:r>
           </a:p>
           <a:p>
@@ -3391,7 +3379,7 @@
           <a:p/>
           <a:p>
             <a:r>
-              <a:t>从产业链角度看，半导体 行业主要由上游设备厂商、</a:t>
+              <a:t>从产业链角度看，医疗科技 行业主要由上游设备厂商、</a:t>
             </a:r>
           </a:p>
           <a:p>
@@ -3401,7 +3389,29 @@
           </a:p>
           <a:p>
             <a:r>
-              <a:t>天益科技有限公司 主要位于产业链的 上游 环节。</a:t>
+              <a:t>华成育卓科技有限公司 主要位于产业链的 上游 环节。</a:t>
+            </a:r>
+          </a:p>
+          <a:p/>
+          <a:p/>
+          <a:p>
+            <a:r>
+              <a:t>惠派国际公司科技有限公司 是中国 人工智能 行业的重要企业之一。</a:t>
+            </a:r>
+          </a:p>
+          <a:p>
+            <a:r>
+              <a:t>根据华辰资本 量化研究部 的研究，该公司成立于 2019 年，</a:t>
+            </a:r>
+          </a:p>
+          <a:p>
+            <a:r>
+              <a:t>目前员工规模约 6944 人。公司近年来持续加大研发投入，</a:t>
+            </a:r>
+          </a:p>
+          <a:p>
+            <a:r>
+              <a:t>在核心技术方面形成了较强的竞争壁垒。</a:t>
             </a:r>
           </a:p>
           <a:p/>
@@ -3463,24 +3473,29 @@
           <a:p/>
           <a:p>
             <a:r>
-              <a:t>根据内部财务模型测算，浦华众城科技有限公司 在未来三年</a:t>
-            </a:r>
-          </a:p>
-          <a:p>
-            <a:r>
-              <a:t>收入复合增长率预计可达到 15% 左右。</a:t>
-            </a:r>
-          </a:p>
-          <a:p>
-            <a:r>
-              <a:t>该预测基于行业需求增长以及公司产能扩张计划。</a:t>
-            </a:r>
-          </a:p>
-          <a:p/>
-          <a:p/>
-          <a:p>
-            <a:r>
-              <a:t>从产业链角度看，机器人 行业主要由上游设备厂商、</a:t>
+              <a:t>创联世纪信息有限公司 是中国 云计算 行业的重要企业之一。</a:t>
+            </a:r>
+          </a:p>
+          <a:p>
+            <a:r>
+              <a:t>根据华辰资本 量化研究部 的研究，该公司成立于 2005 年，</a:t>
+            </a:r>
+          </a:p>
+          <a:p>
+            <a:r>
+              <a:t>目前员工规模约 3637 人。公司近年来持续加大研发投入，</a:t>
+            </a:r>
+          </a:p>
+          <a:p>
+            <a:r>
+              <a:t>在核心技术方面形成了较强的竞争壁垒。</a:t>
+            </a:r>
+          </a:p>
+          <a:p/>
+          <a:p/>
+          <a:p>
+            <a:r>
+              <a:t>从产业链角度看，云计算 行业主要由上游设备厂商、</a:t>
             </a:r>
           </a:p>
           <a:p>
@@ -3490,24 +3505,24 @@
           </a:p>
           <a:p>
             <a:r>
-              <a:t>东方峻景网络有限公司 主要位于产业链的 下游 环节。</a:t>
-            </a:r>
-          </a:p>
-          <a:p/>
-          <a:p/>
-          <a:p>
-            <a:r>
-              <a:t>华辰资本旗下的 HC Global Macro Fund 在最近的资产配置会议中</a:t>
-            </a:r>
-          </a:p>
-          <a:p>
-            <a:r>
-              <a:t>讨论了 人工智能 行业的投资机会，并对 迪摩科技有限公司</a:t>
-            </a:r>
-          </a:p>
-          <a:p>
-            <a:r>
-              <a:t>进行了重点评估。</a:t>
+              <a:t>艾提科信科技有限公司 主要位于产业链的 中游 环节。</a:t>
+            </a:r>
+          </a:p>
+          <a:p/>
+          <a:p/>
+          <a:p>
+            <a:r>
+              <a:t>风险管理部认为，新能源 行业仍然面临若干</a:t>
+            </a:r>
+          </a:p>
+          <a:p>
+            <a:r>
+              <a:t>不确定性因素，包括技术迭代风险、政策变化、</a:t>
+            </a:r>
+          </a:p>
+          <a:p>
+            <a:r>
+              <a:t>以及市场竞争加剧等问题。</a:t>
             </a:r>
           </a:p>
           <a:p/>
@@ -3569,7 +3584,46 @@
           <a:p/>
           <a:p>
             <a:r>
-              <a:t>风险管理部认为，云计算 行业仍然面临若干</a:t>
+              <a:t>从产业链角度看，人工智能 行业主要由上游设备厂商、</a:t>
+            </a:r>
+          </a:p>
+          <a:p>
+            <a:r>
+              <a:t>中游平台企业以及下游应用厂商组成。</a:t>
+            </a:r>
+          </a:p>
+          <a:p>
+            <a:r>
+              <a:t>方正科技传媒有限公司 主要位于产业链的 下游 环节。</a:t>
+            </a:r>
+          </a:p>
+          <a:p/>
+          <a:p/>
+          <a:p>
+            <a:r>
+              <a:t>天开科技有限公司 是中国 消费科技 行业的重要企业之一。</a:t>
+            </a:r>
+          </a:p>
+          <a:p>
+            <a:r>
+              <a:t>根据华辰资本 投资委员会 的研究，该公司成立于 2010 年，</a:t>
+            </a:r>
+          </a:p>
+          <a:p>
+            <a:r>
+              <a:t>目前员工规模约 2726 人。公司近年来持续加大研发投入，</a:t>
+            </a:r>
+          </a:p>
+          <a:p>
+            <a:r>
+              <a:t>在核心技术方面形成了较强的竞争壁垒。</a:t>
+            </a:r>
+          </a:p>
+          <a:p/>
+          <a:p/>
+          <a:p>
+            <a:r>
+              <a:t>风险管理部认为，医疗科技 行业仍然面临若干</a:t>
             </a:r>
           </a:p>
           <a:p>
@@ -3580,45 +3634,6 @@
           <a:p>
             <a:r>
               <a:t>以及市场竞争加剧等问题。</a:t>
-            </a:r>
-          </a:p>
-          <a:p/>
-          <a:p/>
-          <a:p>
-            <a:r>
-              <a:t>风险管理部认为，云计算 行业仍然面临若干</a:t>
-            </a:r>
-          </a:p>
-          <a:p>
-            <a:r>
-              <a:t>不确定性因素，包括技术迭代风险、政策变化、</a:t>
-            </a:r>
-          </a:p>
-          <a:p>
-            <a:r>
-              <a:t>以及市场竞争加剧等问题。</a:t>
-            </a:r>
-          </a:p>
-          <a:p/>
-          <a:p/>
-          <a:p>
-            <a:r>
-              <a:t>立信电子网络有限公司 是中国 云计算 行业的重要企业之一。</a:t>
-            </a:r>
-          </a:p>
-          <a:p>
-            <a:r>
-              <a:t>根据华辰资本 投资委员会 的研究，该公司成立于 2009 年，</a:t>
-            </a:r>
-          </a:p>
-          <a:p>
-            <a:r>
-              <a:t>目前员工规模约 5145 人。公司近年来持续加大研发投入，</a:t>
-            </a:r>
-          </a:p>
-          <a:p>
-            <a:r>
-              <a:t>在核心技术方面形成了较强的竞争壁垒。</a:t>
             </a:r>
           </a:p>
           <a:p/>
@@ -3680,34 +3695,17 @@
           <a:p/>
           <a:p>
             <a:r>
-              <a:t>从产业链角度看，消费科技 行业主要由上游设备厂商、</a:t>
-            </a:r>
-          </a:p>
-          <a:p>
-            <a:r>
-              <a:t>中游平台企业以及下游应用厂商组成。</a:t>
-            </a:r>
-          </a:p>
-          <a:p>
-            <a:r>
-              <a:t>南康网络有限公司 主要位于产业链的 中游 环节。</a:t>
-            </a:r>
-          </a:p>
-          <a:p/>
-          <a:p/>
-          <a:p>
-            <a:r>
-              <a:t>南康网络有限公司 是中国 消费科技 行业的重要企业之一。</a:t>
-            </a:r>
-          </a:p>
-          <a:p>
-            <a:r>
-              <a:t>根据华辰资本 量化研究部 的研究，该公司成立于 2012 年，</a:t>
-            </a:r>
-          </a:p>
-          <a:p>
-            <a:r>
-              <a:t>目前员工规模约 4254 人。公司近年来持续加大研发投入，</a:t>
+              <a:t>戴硕电子网络有限公司 是中国 新能源 行业的重要企业之一。</a:t>
+            </a:r>
+          </a:p>
+          <a:p>
+            <a:r>
+              <a:t>根据华辰资本 量化研究部 的研究，该公司成立于 2016 年，</a:t>
+            </a:r>
+          </a:p>
+          <a:p>
+            <a:r>
+              <a:t>目前员工规模约 2243 人。公司近年来持续加大研发投入，</a:t>
             </a:r>
           </a:p>
           <a:p>
@@ -3719,17 +3717,44 @@
           <a:p/>
           <a:p>
             <a:r>
-              <a:t>根据内部财务模型测算，鸿睿思博信息有限公司 在未来三年</a:t>
-            </a:r>
-          </a:p>
-          <a:p>
-            <a:r>
-              <a:t>收入复合增长率预计可达到 23% 左右。</a:t>
-            </a:r>
-          </a:p>
-          <a:p>
-            <a:r>
-              <a:t>该预测基于行业需求增长以及公司产能扩张计划。</a:t>
+              <a:t>巨奥传媒有限公司 是中国 人工智能 行业的重要企业之一。</a:t>
+            </a:r>
+          </a:p>
+          <a:p>
+            <a:r>
+              <a:t>根据华辰资本 投资策略部 的研究，该公司成立于 2018 年，</a:t>
+            </a:r>
+          </a:p>
+          <a:p>
+            <a:r>
+              <a:t>目前员工规模约 5243 人。公司近年来持续加大研发投入，</a:t>
+            </a:r>
+          </a:p>
+          <a:p>
+            <a:r>
+              <a:t>在核心技术方面形成了较强的竞争壁垒。</a:t>
+            </a:r>
+          </a:p>
+          <a:p/>
+          <a:p/>
+          <a:p>
+            <a:r>
+              <a:t>创汇传媒有限公司 是中国 新能源 行业的重要企业之一。</a:t>
+            </a:r>
+          </a:p>
+          <a:p>
+            <a:r>
+              <a:t>根据华辰资本 风险管理部 的研究，该公司成立于 2017 年，</a:t>
+            </a:r>
+          </a:p>
+          <a:p>
+            <a:r>
+              <a:t>目前员工规模约 7084 人。公司近年来持续加大研发投入，</a:t>
+            </a:r>
+          </a:p>
+          <a:p>
+            <a:r>
+              <a:t>在核心技术方面形成了较强的竞争壁垒。</a:t>
             </a:r>
           </a:p>
           <a:p/>
@@ -3791,7 +3816,51 @@
           <a:p/>
           <a:p>
             <a:r>
-              <a:t>风险管理部认为，半导体 行业仍然面临若干</a:t>
+              <a:t>联软科技有限公司 是中国 消费科技 行业的重要企业之一。</a:t>
+            </a:r>
+          </a:p>
+          <a:p>
+            <a:r>
+              <a:t>根据华辰资本 投资策略部 的研究，该公司成立于 2009 年，</a:t>
+            </a:r>
+          </a:p>
+          <a:p>
+            <a:r>
+              <a:t>目前员工规模约 7080 人。公司近年来持续加大研发投入，</a:t>
+            </a:r>
+          </a:p>
+          <a:p>
+            <a:r>
+              <a:t>在核心技术方面形成了较强的竞争壁垒。</a:t>
+            </a:r>
+          </a:p>
+          <a:p/>
+          <a:p/>
+          <a:p>
+            <a:r>
+              <a:t>图龙信息传媒有限公司 是中国 机器人 行业的重要企业之一。</a:t>
+            </a:r>
+          </a:p>
+          <a:p>
+            <a:r>
+              <a:t>根据华辰资本 风险管理部 的研究，该公司成立于 2007 年，</a:t>
+            </a:r>
+          </a:p>
+          <a:p>
+            <a:r>
+              <a:t>目前员工规模约 2000 人。公司近年来持续加大研发投入，</a:t>
+            </a:r>
+          </a:p>
+          <a:p>
+            <a:r>
+              <a:t>在核心技术方面形成了较强的竞争壁垒。</a:t>
+            </a:r>
+          </a:p>
+          <a:p/>
+          <a:p/>
+          <a:p>
+            <a:r>
+              <a:t>风险管理部认为，消费科技 行业仍然面临若干</a:t>
             </a:r>
           </a:p>
           <a:p>
@@ -3802,45 +3871,6 @@
           <a:p>
             <a:r>
               <a:t>以及市场竞争加剧等问题。</a:t>
-            </a:r>
-          </a:p>
-          <a:p/>
-          <a:p/>
-          <a:p>
-            <a:r>
-              <a:t>风险管理部认为，半导体 行业仍然面临若干</a:t>
-            </a:r>
-          </a:p>
-          <a:p>
-            <a:r>
-              <a:t>不确定性因素，包括技术迭代风险、政策变化、</a:t>
-            </a:r>
-          </a:p>
-          <a:p>
-            <a:r>
-              <a:t>以及市场竞争加剧等问题。</a:t>
-            </a:r>
-          </a:p>
-          <a:p/>
-          <a:p/>
-          <a:p>
-            <a:r>
-              <a:t>九方网络有限公司 是中国 新能源 行业的重要企业之一。</a:t>
-            </a:r>
-          </a:p>
-          <a:p>
-            <a:r>
-              <a:t>根据华辰资本 投资策略部 的研究，该公司成立于 2009 年，</a:t>
-            </a:r>
-          </a:p>
-          <a:p>
-            <a:r>
-              <a:t>目前员工规模约 7967 人。公司近年来持续加大研发投入，</a:t>
-            </a:r>
-          </a:p>
-          <a:p>
-            <a:r>
-              <a:t>在核心技术方面形成了较强的竞争壁垒。</a:t>
             </a:r>
           </a:p>
           <a:p/>
@@ -3902,34 +3932,17 @@
           <a:p/>
           <a:p>
             <a:r>
-              <a:t>根据内部财务模型测算，天益科技有限公司 在未来三年</a:t>
-            </a:r>
-          </a:p>
-          <a:p>
-            <a:r>
-              <a:t>收入复合增长率预计可达到 16% 左右。</a:t>
-            </a:r>
-          </a:p>
-          <a:p>
-            <a:r>
-              <a:t>该预测基于行业需求增长以及公司产能扩张计划。</a:t>
-            </a:r>
-          </a:p>
-          <a:p/>
-          <a:p/>
-          <a:p>
-            <a:r>
-              <a:t>东方峻景传媒有限公司 是中国 新能源 行业的重要企业之一。</a:t>
-            </a:r>
-          </a:p>
-          <a:p>
-            <a:r>
-              <a:t>根据华辰资本 投资策略部 的研究，该公司成立于 2013 年，</a:t>
-            </a:r>
-          </a:p>
-          <a:p>
-            <a:r>
-              <a:t>目前员工规模约 6208 人。公司近年来持续加大研发投入，</a:t>
+              <a:t>惠派国际公司科技有限公司 是中国 人工智能 行业的重要企业之一。</a:t>
+            </a:r>
+          </a:p>
+          <a:p>
+            <a:r>
+              <a:t>根据华辰资本 投资委员会 的研究，该公司成立于 2019 年，</a:t>
+            </a:r>
+          </a:p>
+          <a:p>
+            <a:r>
+              <a:t>目前员工规模约 6944 人。公司近年来持续加大研发投入，</a:t>
             </a:r>
           </a:p>
           <a:p>
@@ -3941,12 +3954,34 @@
           <a:p/>
           <a:p>
             <a:r>
-              <a:t>华辰资本旗下的 HC AI Innovation Fund 在最近的资产配置会议中</a:t>
-            </a:r>
-          </a:p>
-          <a:p>
-            <a:r>
-              <a:t>讨论了 半导体 行业的投资机会，并对 佳禾科技有限公司</a:t>
+              <a:t>联软科技有限公司 是中国 消费科技 行业的重要企业之一。</a:t>
+            </a:r>
+          </a:p>
+          <a:p>
+            <a:r>
+              <a:t>根据华辰资本 投资策略部 的研究，该公司成立于 2009 年，</a:t>
+            </a:r>
+          </a:p>
+          <a:p>
+            <a:r>
+              <a:t>目前员工规模约 7080 人。公司近年来持续加大研发投入，</a:t>
+            </a:r>
+          </a:p>
+          <a:p>
+            <a:r>
+              <a:t>在核心技术方面形成了较强的竞争壁垒。</a:t>
+            </a:r>
+          </a:p>
+          <a:p/>
+          <a:p/>
+          <a:p>
+            <a:r>
+              <a:t>华辰资本旗下的 HC Global Macro Fund 在最近的资产配置会议中</a:t>
+            </a:r>
+          </a:p>
+          <a:p>
+            <a:r>
+              <a:t>讨论了 云计算 行业的投资机会，并对 创联世纪信息有限公司</a:t>
             </a:r>
           </a:p>
           <a:p>
@@ -4013,41 +4048,41 @@
           <a:p/>
           <a:p>
             <a:r>
-              <a:t>根据内部财务模型测算，精芯信息有限公司 在未来三年</a:t>
-            </a:r>
-          </a:p>
-          <a:p>
-            <a:r>
-              <a:t>收入复合增长率预计可达到 23% 左右。</a:t>
-            </a:r>
-          </a:p>
-          <a:p>
-            <a:r>
-              <a:t>该预测基于行业需求增长以及公司产能扩张计划。</a:t>
-            </a:r>
-          </a:p>
-          <a:p/>
-          <a:p/>
-          <a:p>
-            <a:r>
-              <a:t>从产业链角度看，医疗科技 行业主要由上游设备厂商、</a:t>
-            </a:r>
-          </a:p>
-          <a:p>
-            <a:r>
-              <a:t>中游平台企业以及下游应用厂商组成。</a:t>
-            </a:r>
-          </a:p>
-          <a:p>
-            <a:r>
-              <a:t>富罳信息有限公司 主要位于产业链的 中游 环节。</a:t>
-            </a:r>
-          </a:p>
-          <a:p/>
-          <a:p/>
-          <a:p>
-            <a:r>
               <a:t>风险管理部认为，半导体 行业仍然面临若干</a:t>
+            </a:r>
+          </a:p>
+          <a:p>
+            <a:r>
+              <a:t>不确定性因素，包括技术迭代风险、政策变化、</a:t>
+            </a:r>
+          </a:p>
+          <a:p>
+            <a:r>
+              <a:t>以及市场竞争加剧等问题。</a:t>
+            </a:r>
+          </a:p>
+          <a:p/>
+          <a:p/>
+          <a:p>
+            <a:r>
+              <a:t>华辰资本旗下的 HC Alpha Growth Fund 在最近的资产配置会议中</a:t>
+            </a:r>
+          </a:p>
+          <a:p>
+            <a:r>
+              <a:t>讨论了 半导体 行业的投资机会，并对 信诚致远网络有限公司</a:t>
+            </a:r>
+          </a:p>
+          <a:p>
+            <a:r>
+              <a:t>进行了重点评估。</a:t>
+            </a:r>
+          </a:p>
+          <a:p/>
+          <a:p/>
+          <a:p>
+            <a:r>
+              <a:t>风险管理部认为，云计算 行业仍然面临若干</a:t>
             </a:r>
           </a:p>
           <a:p>
@@ -4119,51 +4154,46 @@
           <a:p/>
           <a:p>
             <a:r>
-              <a:t>和泰科技有限公司 是中国 人工智能 行业的重要企业之一。</a:t>
-            </a:r>
-          </a:p>
-          <a:p>
-            <a:r>
-              <a:t>根据华辰资本 投资策略部 的研究，该公司成立于 2008 年，</a:t>
-            </a:r>
-          </a:p>
-          <a:p>
-            <a:r>
-              <a:t>目前员工规模约 6443 人。公司近年来持续加大研发投入，</a:t>
-            </a:r>
-          </a:p>
-          <a:p>
-            <a:r>
-              <a:t>在核心技术方面形成了较强的竞争壁垒。</a:t>
-            </a:r>
-          </a:p>
-          <a:p/>
-          <a:p/>
-          <a:p>
-            <a:r>
-              <a:t>根据内部财务模型测算，天益信息有限公司 在未来三年</a:t>
-            </a:r>
-          </a:p>
-          <a:p>
-            <a:r>
-              <a:t>收入复合增长率预计可达到 22% 左右。</a:t>
-            </a:r>
-          </a:p>
-          <a:p>
-            <a:r>
-              <a:t>该预测基于行业需求增长以及公司产能扩张计划。</a:t>
-            </a:r>
-          </a:p>
-          <a:p/>
-          <a:p/>
-          <a:p>
-            <a:r>
-              <a:t>华辰资本旗下的 HC Alpha Growth Fund 在最近的资产配置会议中</a:t>
-            </a:r>
-          </a:p>
-          <a:p>
-            <a:r>
-              <a:t>讨论了 半导体 行业的投资机会，并对 华远软件信息有限公司</a:t>
+              <a:t>从产业链角度看，机器人 行业主要由上游设备厂商、</a:t>
+            </a:r>
+          </a:p>
+          <a:p>
+            <a:r>
+              <a:t>中游平台企业以及下游应用厂商组成。</a:t>
+            </a:r>
+          </a:p>
+          <a:p>
+            <a:r>
+              <a:t>通际名联网络有限公司 主要位于产业链的 下游 环节。</a:t>
+            </a:r>
+          </a:p>
+          <a:p/>
+          <a:p/>
+          <a:p>
+            <a:r>
+              <a:t>从产业链角度看，人工智能 行业主要由上游设备厂商、</a:t>
+            </a:r>
+          </a:p>
+          <a:p>
+            <a:r>
+              <a:t>中游平台企业以及下游应用厂商组成。</a:t>
+            </a:r>
+          </a:p>
+          <a:p>
+            <a:r>
+              <a:t>方正科技传媒有限公司 主要位于产业链的 中游 环节。</a:t>
+            </a:r>
+          </a:p>
+          <a:p/>
+          <a:p/>
+          <a:p>
+            <a:r>
+              <a:t>华辰资本旗下的 HC Quant Arbitrage Fund 在最近的资产配置会议中</a:t>
+            </a:r>
+          </a:p>
+          <a:p>
+            <a:r>
+              <a:t>讨论了 半导体 行业的投资机会，并对 精芯信息有限公司</a:t>
             </a:r>
           </a:p>
           <a:p>
@@ -4230,7 +4260,41 @@
           <a:p/>
           <a:p>
             <a:r>
-              <a:t>风险管理部认为，云计算 行业仍然面临若干</a:t>
+              <a:t>华辰资本旗下的 HC Alpha Growth Fund 在最近的资产配置会议中</a:t>
+            </a:r>
+          </a:p>
+          <a:p>
+            <a:r>
+              <a:t>讨论了 半导体 行业的投资机会，并对 精芯信息有限公司</a:t>
+            </a:r>
+          </a:p>
+          <a:p>
+            <a:r>
+              <a:t>进行了重点评估。</a:t>
+            </a:r>
+          </a:p>
+          <a:p/>
+          <a:p/>
+          <a:p>
+            <a:r>
+              <a:t>从产业链角度看，消费科技 行业主要由上游设备厂商、</a:t>
+            </a:r>
+          </a:p>
+          <a:p>
+            <a:r>
+              <a:t>中游平台企业以及下游应用厂商组成。</a:t>
+            </a:r>
+          </a:p>
+          <a:p>
+            <a:r>
+              <a:t>鑫博腾飞信息有限公司 主要位于产业链的 上游 环节。</a:t>
+            </a:r>
+          </a:p>
+          <a:p/>
+          <a:p/>
+          <a:p>
+            <a:r>
+              <a:t>风险管理部认为，人工智能 行业仍然面临若干</a:t>
             </a:r>
           </a:p>
           <a:p>
@@ -4241,40 +4305,6 @@
           <a:p>
             <a:r>
               <a:t>以及市场竞争加剧等问题。</a:t>
-            </a:r>
-          </a:p>
-          <a:p/>
-          <a:p/>
-          <a:p>
-            <a:r>
-              <a:t>华辰资本旗下的 HC Alpha Growth Fund 在最近的资产配置会议中</a:t>
-            </a:r>
-          </a:p>
-          <a:p>
-            <a:r>
-              <a:t>讨论了 新能源 行业的投资机会，并对 九方信息有限公司</a:t>
-            </a:r>
-          </a:p>
-          <a:p>
-            <a:r>
-              <a:t>进行了重点评估。</a:t>
-            </a:r>
-          </a:p>
-          <a:p/>
-          <a:p/>
-          <a:p>
-            <a:r>
-              <a:t>从产业链角度看，医疗科技 行业主要由上游设备厂商、</a:t>
-            </a:r>
-          </a:p>
-          <a:p>
-            <a:r>
-              <a:t>中游平台企业以及下游应用厂商组成。</a:t>
-            </a:r>
-          </a:p>
-          <a:p>
-            <a:r>
-              <a:t>创联世纪科技有限公司 主要位于产业链的 中游 环节。</a:t>
             </a:r>
           </a:p>
           <a:p/>
@@ -4336,34 +4366,12 @@
           <a:p/>
           <a:p>
             <a:r>
-              <a:t>佳禾科技有限公司 是中国 半导体 行业的重要企业之一。</a:t>
-            </a:r>
-          </a:p>
-          <a:p>
-            <a:r>
-              <a:t>根据华辰资本 投资策略部 的研究，该公司成立于 2015 年，</a:t>
-            </a:r>
-          </a:p>
-          <a:p>
-            <a:r>
-              <a:t>目前员工规模约 3623 人。公司近年来持续加大研发投入，</a:t>
-            </a:r>
-          </a:p>
-          <a:p>
-            <a:r>
-              <a:t>在核心技术方面形成了较强的竞争壁垒。</a:t>
-            </a:r>
-          </a:p>
-          <a:p/>
-          <a:p/>
-          <a:p>
-            <a:r>
-              <a:t>华辰资本旗下的 HC Alpha Growth Fund 在最近的资产配置会议中</a:t>
-            </a:r>
-          </a:p>
-          <a:p>
-            <a:r>
-              <a:t>讨论了 半导体 行业的投资机会，并对 鸿睿思博信息有限公司</a:t>
+              <a:t>华辰资本旗下的 HC Energy Transition Fund 在最近的资产配置会议中</a:t>
+            </a:r>
+          </a:p>
+          <a:p>
+            <a:r>
+              <a:t>讨论了 消费科技 行业的投资机会，并对 联通时科传媒有限公司</a:t>
             </a:r>
           </a:p>
           <a:p>
@@ -4375,22 +4383,34 @@
           <a:p/>
           <a:p>
             <a:r>
-              <a:t>鸿睿思博网络有限公司 是中国 新能源 行业的重要企业之一。</a:t>
-            </a:r>
-          </a:p>
-          <a:p>
-            <a:r>
-              <a:t>根据华辰资本 资产配置委员会 的研究，该公司成立于 2015 年，</a:t>
-            </a:r>
-          </a:p>
-          <a:p>
-            <a:r>
-              <a:t>目前员工规模约 1240 人。公司近年来持续加大研发投入，</a:t>
-            </a:r>
-          </a:p>
-          <a:p>
-            <a:r>
-              <a:t>在核心技术方面形成了较强的竞争壁垒。</a:t>
+              <a:t>根据内部财务模型测算，华泰通安传媒有限公司 在未来三年</a:t>
+            </a:r>
+          </a:p>
+          <a:p>
+            <a:r>
+              <a:t>收入复合增长率预计可达到 26% 左右。</a:t>
+            </a:r>
+          </a:p>
+          <a:p>
+            <a:r>
+              <a:t>该预测基于行业需求增长以及公司产能扩张计划。</a:t>
+            </a:r>
+          </a:p>
+          <a:p/>
+          <a:p/>
+          <a:p>
+            <a:r>
+              <a:t>华辰资本旗下的 HC Quant Arbitrage Fund 在最近的资产配置会议中</a:t>
+            </a:r>
+          </a:p>
+          <a:p>
+            <a:r>
+              <a:t>讨论了 机器人 行业的投资机会，并对 通际名联网络有限公司</a:t>
+            </a:r>
+          </a:p>
+          <a:p>
+            <a:r>
+              <a:t>进行了重点评估。</a:t>
             </a:r>
           </a:p>
           <a:p/>
@@ -4452,41 +4472,29 @@
           <a:p/>
           <a:p>
             <a:r>
-              <a:t>华辰资本旗下的 HC Alpha Growth Fund 在最近的资产配置会议中</a:t>
-            </a:r>
-          </a:p>
-          <a:p>
-            <a:r>
-              <a:t>讨论了 云计算 行业的投资机会，并对 国讯网络有限公司</a:t>
-            </a:r>
-          </a:p>
-          <a:p>
-            <a:r>
-              <a:t>进行了重点评估。</a:t>
-            </a:r>
-          </a:p>
-          <a:p/>
-          <a:p/>
-          <a:p>
-            <a:r>
-              <a:t>华辰资本旗下的 HC Alpha Growth Fund 在最近的资产配置会议中</a:t>
-            </a:r>
-          </a:p>
-          <a:p>
-            <a:r>
-              <a:t>讨论了 机器人 行业的投资机会，并对 东方峻景网络有限公司</a:t>
-            </a:r>
-          </a:p>
-          <a:p>
-            <a:r>
-              <a:t>进行了重点评估。</a:t>
-            </a:r>
-          </a:p>
-          <a:p/>
-          <a:p/>
-          <a:p>
-            <a:r>
-              <a:t>从产业链角度看，半导体 行业主要由上游设备厂商、</a:t>
+              <a:t>通际名联科技有限公司 是中国 人工智能 行业的重要企业之一。</a:t>
+            </a:r>
+          </a:p>
+          <a:p>
+            <a:r>
+              <a:t>根据华辰资本 风险管理部 的研究，该公司成立于 2011 年，</a:t>
+            </a:r>
+          </a:p>
+          <a:p>
+            <a:r>
+              <a:t>目前员工规模约 6459 人。公司近年来持续加大研发投入，</a:t>
+            </a:r>
+          </a:p>
+          <a:p>
+            <a:r>
+              <a:t>在核心技术方面形成了较强的竞争壁垒。</a:t>
+            </a:r>
+          </a:p>
+          <a:p/>
+          <a:p/>
+          <a:p>
+            <a:r>
+              <a:t>从产业链角度看，人工智能 行业主要由上游设备厂商、</a:t>
             </a:r>
           </a:p>
           <a:p>
@@ -4496,7 +4504,24 @@
           </a:p>
           <a:p>
             <a:r>
-              <a:t>浦华众城科技有限公司 主要位于产业链的 中游 环节。</a:t>
+              <a:t>华成育卓传媒有限公司 主要位于产业链的 下游 环节。</a:t>
+            </a:r>
+          </a:p>
+          <a:p/>
+          <a:p/>
+          <a:p>
+            <a:r>
+              <a:t>从产业链角度看，云计算 行业主要由上游设备厂商、</a:t>
+            </a:r>
+          </a:p>
+          <a:p>
+            <a:r>
+              <a:t>中游平台企业以及下游应用厂商组成。</a:t>
+            </a:r>
+          </a:p>
+          <a:p>
+            <a:r>
+              <a:t>艾提科信科技有限公司 主要位于产业链的 下游 环节。</a:t>
             </a:r>
           </a:p>
           <a:p/>
@@ -4558,7 +4583,24 @@
           <a:p/>
           <a:p>
             <a:r>
-              <a:t>风险管理部认为，半导体 行业仍然面临若干</a:t>
+              <a:t>从产业链角度看，半导体 行业主要由上游设备厂商、</a:t>
+            </a:r>
+          </a:p>
+          <a:p>
+            <a:r>
+              <a:t>中游平台企业以及下游应用厂商组成。</a:t>
+            </a:r>
+          </a:p>
+          <a:p>
+            <a:r>
+              <a:t>华泰通安网络有限公司 主要位于产业链的 中游 环节。</a:t>
+            </a:r>
+          </a:p>
+          <a:p/>
+          <a:p/>
+          <a:p>
+            <a:r>
+              <a:t>风险管理部认为，云计算 行业仍然面临若干</a:t>
             </a:r>
           </a:p>
           <a:p>
@@ -4585,24 +4627,7 @@
           </a:p>
           <a:p>
             <a:r>
-              <a:t>国讯网络有限公司 主要位于产业链的 上游 环节。</a:t>
-            </a:r>
-          </a:p>
-          <a:p/>
-          <a:p/>
-          <a:p>
-            <a:r>
-              <a:t>风险管理部认为，人工智能 行业仍然面临若干</a:t>
-            </a:r>
-          </a:p>
-          <a:p>
-            <a:r>
-              <a:t>不确定性因素，包括技术迭代风险、政策变化、</a:t>
-            </a:r>
-          </a:p>
-          <a:p>
-            <a:r>
-              <a:t>以及市场竞争加剧等问题。</a:t>
+              <a:t>泰麒麟网络有限公司 主要位于产业链的 上游 环节。</a:t>
             </a:r>
           </a:p>
           <a:p/>
@@ -4664,56 +4689,51 @@
           <a:p/>
           <a:p>
             <a:r>
-              <a:t>风险管理部认为，半导体 行业仍然面临若干</a:t>
-            </a:r>
-          </a:p>
-          <a:p>
-            <a:r>
-              <a:t>不确定性因素，包括技术迭代风险、政策变化、</a:t>
-            </a:r>
-          </a:p>
-          <a:p>
-            <a:r>
-              <a:t>以及市场竞争加剧等问题。</a:t>
-            </a:r>
-          </a:p>
-          <a:p/>
-          <a:p/>
-          <a:p>
-            <a:r>
-              <a:t>创亿信息有限公司 是中国 医疗科技 行业的重要企业之一。</a:t>
-            </a:r>
-          </a:p>
-          <a:p>
-            <a:r>
-              <a:t>根据华辰资本 投资委员会 的研究，该公司成立于 2007 年，</a:t>
-            </a:r>
-          </a:p>
-          <a:p>
-            <a:r>
-              <a:t>目前员工规模约 7601 人。公司近年来持续加大研发投入，</a:t>
-            </a:r>
-          </a:p>
-          <a:p>
-            <a:r>
-              <a:t>在核心技术方面形成了较强的竞争壁垒。</a:t>
-            </a:r>
-          </a:p>
-          <a:p/>
-          <a:p/>
-          <a:p>
-            <a:r>
-              <a:t>根据内部财务模型测算，国讯网络有限公司 在未来三年</a:t>
-            </a:r>
-          </a:p>
-          <a:p>
-            <a:r>
-              <a:t>收入复合增长率预计可达到 21% 左右。</a:t>
+              <a:t>根据内部财务模型测算，巨奥传媒有限公司 在未来三年</a:t>
+            </a:r>
+          </a:p>
+          <a:p>
+            <a:r>
+              <a:t>收入复合增长率预计可达到 11% 左右。</a:t>
             </a:r>
           </a:p>
           <a:p>
             <a:r>
               <a:t>该预测基于行业需求增长以及公司产能扩张计划。</a:t>
+            </a:r>
+          </a:p>
+          <a:p/>
+          <a:p/>
+          <a:p>
+            <a:r>
+              <a:t>从产业链角度看，半导体 行业主要由上游设备厂商、</a:t>
+            </a:r>
+          </a:p>
+          <a:p>
+            <a:r>
+              <a:t>中游平台企业以及下游应用厂商组成。</a:t>
+            </a:r>
+          </a:p>
+          <a:p>
+            <a:r>
+              <a:t>中建创业科技有限公司 主要位于产业链的 上游 环节。</a:t>
+            </a:r>
+          </a:p>
+          <a:p/>
+          <a:p/>
+          <a:p>
+            <a:r>
+              <a:t>华辰资本旗下的 HC Energy Transition Fund 在最近的资产配置会议中</a:t>
+            </a:r>
+          </a:p>
+          <a:p>
+            <a:r>
+              <a:t>讨论了 消费科技 行业的投资机会，并对 方正科技信息有限公司</a:t>
+            </a:r>
+          </a:p>
+          <a:p>
+            <a:r>
+              <a:t>进行了重点评估。</a:t>
             </a:r>
           </a:p>
           <a:p/>
